--- a/Slide/新歓スライド.pptx
+++ b/Slide/新歓スライド.pptx
@@ -22,12 +22,12 @@
     <p:sldId id="308" r:id="rId13"/>
     <p:sldId id="309" r:id="rId14"/>
     <p:sldId id="302" r:id="rId15"/>
-    <p:sldId id="310" r:id="rId16"/>
-    <p:sldId id="312" r:id="rId17"/>
-    <p:sldId id="296" r:id="rId18"/>
-    <p:sldId id="295" r:id="rId19"/>
-    <p:sldId id="301" r:id="rId20"/>
-    <p:sldId id="297" r:id="rId21"/>
+    <p:sldId id="312" r:id="rId16"/>
+    <p:sldId id="296" r:id="rId17"/>
+    <p:sldId id="295" r:id="rId18"/>
+    <p:sldId id="301" r:id="rId19"/>
+    <p:sldId id="297" r:id="rId20"/>
+    <p:sldId id="320" r:id="rId21"/>
     <p:sldId id="313" r:id="rId22"/>
     <p:sldId id="314" r:id="rId23"/>
     <p:sldId id="315" r:id="rId24"/>
@@ -10148,8 +10148,8 @@
         </p:nvSpPr>
         <p:spPr>
           <a:xfrm>
-            <a:off x="8189843" y="5774392"/>
-            <a:ext cx="4002157" cy="954067"/>
+            <a:off x="7747001" y="5774392"/>
+            <a:ext cx="4445000" cy="954067"/>
           </a:xfrm>
           <a:prstGeom prst="rect">
             <a:avLst/>
@@ -10220,7 +10220,7 @@
                 <a:cs typeface="Calibri"/>
                 <a:sym typeface="Calibri"/>
               </a:rPr>
-              <a:t>25</a:t>
+              <a:t>25B</a:t>
             </a:r>
             <a:r>
               <a:rPr lang="ja-JP" sz="2800" dirty="0">
@@ -10300,7 +10300,7 @@
                 <a:cs typeface="Calibri"/>
                 <a:sym typeface="Calibri"/>
               </a:rPr>
-              <a:t>25</a:t>
+              <a:t>25B</a:t>
             </a:r>
             <a:r>
               <a:rPr lang="ja-JP" sz="2800" dirty="0">
@@ -10486,7 +10486,7 @@
         </p:blipFill>
         <p:spPr>
           <a:xfrm>
-            <a:off x="741512" y="4079630"/>
+            <a:off x="323694" y="3429000"/>
             <a:ext cx="5634418" cy="2591601"/>
           </a:xfrm>
           <a:prstGeom prst="rect">
@@ -10512,8 +10512,8 @@
         </p:nvSpPr>
         <p:spPr>
           <a:xfrm>
-            <a:off x="427383" y="1948996"/>
-            <a:ext cx="10515600" cy="1978948"/>
+            <a:off x="103367" y="1948996"/>
+            <a:ext cx="11950810" cy="1121023"/>
           </a:xfrm>
         </p:spPr>
         <p:txBody>
@@ -10552,18 +10552,6 @@
               <a:rPr lang="en-US" altLang="ja-JP" dirty="0"/>
               <a:t>Download Zip)</a:t>
             </a:r>
-          </a:p>
-          <a:p>
-            <a:r>
-              <a:rPr lang="en-US" altLang="ja-JP" dirty="0">
-                <a:hlinkClick r:id="rId3"/>
-              </a:rPr>
-              <a:t>https://github.com/CREATE-ROCKET/Avi_Freshers_Welcome_Event_2026/tree/master</a:t>
-            </a:r>
-            <a:endParaRPr lang="en-US" altLang="ja-JP" dirty="0"/>
-          </a:p>
-          <a:p>
-            <a:endParaRPr lang="ja-JP" altLang="en-US" dirty="0"/>
           </a:p>
         </p:txBody>
       </p:sp>
@@ -10660,7 +10648,7 @@
         </p:nvSpPr>
         <p:spPr>
           <a:xfrm>
-            <a:off x="3804886" y="6270751"/>
+            <a:off x="3387068" y="5620121"/>
             <a:ext cx="840757" cy="196382"/>
           </a:xfrm>
           <a:prstGeom prst="rect">
@@ -10714,7 +10702,7 @@
         </p:nvSpPr>
         <p:spPr>
           <a:xfrm>
-            <a:off x="5987888" y="5709199"/>
+            <a:off x="5570070" y="5058569"/>
             <a:ext cx="2775005" cy="922277"/>
           </a:xfrm>
           <a:prstGeom prst="wedgeRectCallout">
@@ -10770,6 +10758,95 @@
               <a:latin typeface="A-OTF Gothic BBB Pr6N Medium" panose="020B0400000000000000" pitchFamily="34" charset="-128"/>
               <a:ea typeface="A-OTF Gothic BBB Pr6N Medium" panose="020B0400000000000000" pitchFamily="34" charset="-128"/>
             </a:endParaRPr>
+          </a:p>
+        </p:txBody>
+      </p:sp>
+      <p:pic>
+        <p:nvPicPr>
+          <p:cNvPr id="4" name="図 3" descr="The image depicts a QR code, which is a two-dimensional barcode that can be scanned by a QR reader to access specific information or content.&#10;&#10;AI 生成コンテンツは誤りを含む可能性があります。">
+            <a:extLst>
+              <a:ext uri="{FF2B5EF4-FFF2-40B4-BE49-F238E27FC236}">
+                <a16:creationId xmlns:a16="http://schemas.microsoft.com/office/drawing/2014/main" id="{BB03169C-F21C-98B0-2CE2-3BB3B8C2BF98}"/>
+              </a:ext>
+            </a:extLst>
+          </p:cNvPr>
+          <p:cNvPicPr>
+            <a:picLocks noChangeAspect="1"/>
+          </p:cNvPicPr>
+          <p:nvPr/>
+        </p:nvPicPr>
+        <p:blipFill>
+          <a:blip r:embed="rId3"/>
+          <a:stretch>
+            <a:fillRect/>
+          </a:stretch>
+        </p:blipFill>
+        <p:spPr>
+          <a:xfrm>
+            <a:off x="9801895" y="4555236"/>
+            <a:ext cx="1978948" cy="1978948"/>
+          </a:xfrm>
+          <a:prstGeom prst="rect">
+            <a:avLst/>
+          </a:prstGeom>
+        </p:spPr>
+      </p:pic>
+      <p:sp>
+        <p:nvSpPr>
+          <p:cNvPr id="6" name="テキスト ボックス 5">
+            <a:extLst>
+              <a:ext uri="{FF2B5EF4-FFF2-40B4-BE49-F238E27FC236}">
+                <a16:creationId xmlns:a16="http://schemas.microsoft.com/office/drawing/2014/main" id="{6F631582-D095-2E93-CBC2-79EE16435F84}"/>
+              </a:ext>
+            </a:extLst>
+          </p:cNvPr>
+          <p:cNvSpPr txBox="1"/>
+          <p:nvPr/>
+        </p:nvSpPr>
+        <p:spPr>
+          <a:xfrm>
+            <a:off x="6858062" y="3116899"/>
+            <a:ext cx="5196115" cy="923330"/>
+          </a:xfrm>
+          <a:prstGeom prst="rect">
+            <a:avLst/>
+          </a:prstGeom>
+          <a:noFill/>
+        </p:spPr>
+        <p:txBody>
+          <a:bodyPr wrap="square" rtlCol="0">
+            <a:spAutoFit/>
+          </a:bodyPr>
+          <a:lstStyle/>
+          <a:p>
+            <a:r>
+              <a:rPr kumimoji="1" lang="ja-JP" altLang="en-US" sz="1800" dirty="0"/>
+              <a:t>この先のリンクの</a:t>
+            </a:r>
+            <a:r>
+              <a:rPr kumimoji="1" lang="en-US" altLang="ja-JP" sz="1800" dirty="0"/>
+              <a:t>URL</a:t>
+            </a:r>
+            <a:r>
+              <a:rPr kumimoji="1" lang="ja-JP" altLang="en-US" sz="1800" dirty="0"/>
+              <a:t>をどうにかパソコンに送って、パソコンで開こう</a:t>
+            </a:r>
+            <a:br>
+              <a:rPr kumimoji="1" lang="en-US" altLang="ja-JP" sz="1800" dirty="0"/>
+            </a:br>
+            <a:r>
+              <a:rPr kumimoji="1" lang="ja-JP" altLang="en-US" sz="1800" dirty="0"/>
+              <a:t>できない人は、</a:t>
+            </a:r>
+            <a:r>
+              <a:rPr kumimoji="1" lang="en-US" altLang="ja-JP" sz="1800" dirty="0"/>
+              <a:t>USB</a:t>
+            </a:r>
+            <a:r>
+              <a:rPr kumimoji="1" lang="ja-JP" altLang="en-US" sz="1800" dirty="0"/>
+              <a:t>メモリも用意してあります</a:t>
+            </a:r>
+            <a:endParaRPr kumimoji="1" lang="en-US" altLang="ja-JP" sz="1800" dirty="0"/>
           </a:p>
         </p:txBody>
       </p:sp>
@@ -11266,10 +11343,10 @@
       </p:pic>
       <p:sp>
         <p:nvSpPr>
-          <p:cNvPr id="20" name="テキスト ボックス 19">
+          <p:cNvPr id="4" name="テキスト ボックス 3">
             <a:extLst>
               <a:ext uri="{FF2B5EF4-FFF2-40B4-BE49-F238E27FC236}">
-                <a16:creationId xmlns:a16="http://schemas.microsoft.com/office/drawing/2014/main" id="{25FBE79A-8EA0-67A9-5F22-573E282CED40}"/>
+                <a16:creationId xmlns:a16="http://schemas.microsoft.com/office/drawing/2014/main" id="{EDB1B5A5-2653-BA8A-295D-10804FF01258}"/>
               </a:ext>
             </a:extLst>
           </p:cNvPr>
@@ -11278,7 +11355,7 @@
         </p:nvSpPr>
         <p:spPr>
           <a:xfrm>
-            <a:off x="6593305" y="2582779"/>
+            <a:off x="6609197" y="2936165"/>
             <a:ext cx="5325979" cy="2554545"/>
           </a:xfrm>
           <a:prstGeom prst="rect">
@@ -11305,32 +11382,21 @@
               </a:lnSpc>
             </a:pPr>
             <a:r>
-              <a:rPr lang="ja-JP" altLang="en-US" sz="3200" dirty="0"/>
-              <a:t>✓ </a:t>
-            </a:r>
-            <a:r>
               <a:rPr lang="en-US" altLang="ja-JP" sz="3200" dirty="0"/>
               <a:t>Path</a:t>
             </a:r>
             <a:r>
               <a:rPr lang="ja-JP" altLang="en-US" sz="3200" dirty="0"/>
-              <a:t>への追加 </a:t>
+              <a:t>への追加： ✓ </a:t>
             </a:r>
             <a:endParaRPr lang="en-US" altLang="ja-JP" sz="3200" dirty="0"/>
           </a:p>
           <a:p>
             <a:r>
               <a:rPr lang="ja-JP" altLang="en-US" sz="3200" dirty="0"/>
-              <a:t>✓ デスクトップ上にアイコンを</a:t>
+              <a:t>デスクトップ上にアイコンを作成する：任意で✓ </a:t>
             </a:r>
             <a:endParaRPr lang="en-US" altLang="ja-JP" sz="3200" dirty="0"/>
-          </a:p>
-          <a:p>
-            <a:r>
-              <a:rPr lang="ja-JP" altLang="en-US" sz="3200" dirty="0"/>
-              <a:t>　　作成する </a:t>
-            </a:r>
-            <a:endParaRPr kumimoji="1" lang="ja-JP" altLang="en-US" sz="3200" dirty="0"/>
           </a:p>
         </p:txBody>
       </p:sp>
@@ -11631,149 +11697,6 @@
           <p:cNvPr id="2" name="タイトル 1">
             <a:extLst>
               <a:ext uri="{FF2B5EF4-FFF2-40B4-BE49-F238E27FC236}">
-                <a16:creationId xmlns:a16="http://schemas.microsoft.com/office/drawing/2014/main" id="{831881F0-D9FF-B790-DF4B-884C9AF5DD20}"/>
-              </a:ext>
-            </a:extLst>
-          </p:cNvPr>
-          <p:cNvSpPr>
-            <a:spLocks noGrp="1"/>
-          </p:cNvSpPr>
-          <p:nvPr>
-            <p:ph type="title"/>
-          </p:nvPr>
-        </p:nvSpPr>
-        <p:spPr/>
-        <p:txBody>
-          <a:bodyPr/>
-          <a:lstStyle/>
-          <a:p>
-            <a:r>
-              <a:rPr lang="ja-JP" altLang="en-US" dirty="0"/>
-              <a:t>プロジェクト作成</a:t>
-            </a:r>
-            <a:endParaRPr kumimoji="1" lang="ja-JP" altLang="en-US" dirty="0"/>
-          </a:p>
-        </p:txBody>
-      </p:sp>
-      <p:pic>
-        <p:nvPicPr>
-          <p:cNvPr id="5" name="図 4">
-            <a:extLst>
-              <a:ext uri="{FF2B5EF4-FFF2-40B4-BE49-F238E27FC236}">
-                <a16:creationId xmlns:a16="http://schemas.microsoft.com/office/drawing/2014/main" id="{2DC95FE8-8709-C422-AAE0-9B4F9B7B80C1}"/>
-              </a:ext>
-            </a:extLst>
-          </p:cNvPr>
-          <p:cNvPicPr>
-            <a:picLocks noChangeAspect="1"/>
-          </p:cNvPicPr>
-          <p:nvPr/>
-        </p:nvPicPr>
-        <p:blipFill>
-          <a:blip r:embed="rId2">
-            <a:extLst>
-              <a:ext uri="{28A0092B-C50C-407E-A947-70E740481C1C}">
-                <a14:useLocalDpi xmlns:a14="http://schemas.microsoft.com/office/drawing/2010/main" val="0"/>
-              </a:ext>
-            </a:extLst>
-          </a:blip>
-          <a:stretch>
-            <a:fillRect/>
-          </a:stretch>
-        </p:blipFill>
-        <p:spPr>
-          <a:xfrm>
-            <a:off x="640080" y="1363544"/>
-            <a:ext cx="10911840" cy="4130911"/>
-          </a:xfrm>
-          <a:prstGeom prst="rect">
-            <a:avLst/>
-          </a:prstGeom>
-        </p:spPr>
-      </p:pic>
-      <p:sp>
-        <p:nvSpPr>
-          <p:cNvPr id="6" name="テキスト ボックス 5">
-            <a:extLst>
-              <a:ext uri="{FF2B5EF4-FFF2-40B4-BE49-F238E27FC236}">
-                <a16:creationId xmlns:a16="http://schemas.microsoft.com/office/drawing/2014/main" id="{B920118F-143F-9304-A767-AFF9DF17E190}"/>
-              </a:ext>
-            </a:extLst>
-          </p:cNvPr>
-          <p:cNvSpPr txBox="1"/>
-          <p:nvPr/>
-        </p:nvSpPr>
-        <p:spPr>
-          <a:xfrm>
-            <a:off x="1899920" y="5835848"/>
-            <a:ext cx="9652000" cy="584775"/>
-          </a:xfrm>
-          <a:prstGeom prst="rect">
-            <a:avLst/>
-          </a:prstGeom>
-          <a:noFill/>
-        </p:spPr>
-        <p:txBody>
-          <a:bodyPr wrap="square" rtlCol="0">
-            <a:spAutoFit/>
-          </a:bodyPr>
-          <a:lstStyle/>
-          <a:p>
-            <a:r>
-              <a:rPr lang="en-US" altLang="ja-JP" sz="3200" dirty="0"/>
-              <a:t>PIO Home</a:t>
-            </a:r>
-            <a:r>
-              <a:rPr lang="ja-JP" altLang="en-US" sz="3200" dirty="0"/>
-              <a:t>が開く → </a:t>
-            </a:r>
-            <a:r>
-              <a:rPr lang="en-US" altLang="ja-JP" sz="3200" dirty="0"/>
-              <a:t>+New Project</a:t>
-            </a:r>
-            <a:r>
-              <a:rPr lang="ja-JP" altLang="en-US" sz="3200" dirty="0"/>
-              <a:t>を選択 </a:t>
-            </a:r>
-            <a:endParaRPr kumimoji="1" lang="ja-JP" altLang="en-US" sz="3200" dirty="0"/>
-          </a:p>
-        </p:txBody>
-      </p:sp>
-    </p:spTree>
-    <p:extLst>
-      <p:ext uri="{BB962C8B-B14F-4D97-AF65-F5344CB8AC3E}">
-        <p14:creationId xmlns:p14="http://schemas.microsoft.com/office/powerpoint/2010/main" val="170668235"/>
-      </p:ext>
-    </p:extLst>
-  </p:cSld>
-  <p:clrMapOvr>
-    <a:masterClrMapping/>
-  </p:clrMapOvr>
-</p:sld>
-</file>
-
-<file path=ppt/slides/slide16.xml><?xml version="1.0" encoding="utf-8"?>
-<p:sld xmlns:a="http://schemas.openxmlformats.org/drawingml/2006/main" xmlns:r="http://schemas.openxmlformats.org/officeDocument/2006/relationships" xmlns:p="http://schemas.openxmlformats.org/presentationml/2006/main">
-  <p:cSld>
-    <p:spTree>
-      <p:nvGrpSpPr>
-        <p:cNvPr id="1" name=""/>
-        <p:cNvGrpSpPr/>
-        <p:nvPr/>
-      </p:nvGrpSpPr>
-      <p:grpSpPr>
-        <a:xfrm>
-          <a:off x="0" y="0"/>
-          <a:ext cx="0" cy="0"/>
-          <a:chOff x="0" y="0"/>
-          <a:chExt cx="0" cy="0"/>
-        </a:xfrm>
-      </p:grpSpPr>
-      <p:sp>
-        <p:nvSpPr>
-          <p:cNvPr id="2" name="タイトル 1">
-            <a:extLst>
-              <a:ext uri="{FF2B5EF4-FFF2-40B4-BE49-F238E27FC236}">
                 <a16:creationId xmlns:a16="http://schemas.microsoft.com/office/drawing/2014/main" id="{3E7F5DCE-F965-B7B2-6A35-6C0955419F7A}"/>
               </a:ext>
             </a:extLst>
@@ -12125,7 +12048,7 @@
 </p:sld>
 </file>
 
-<file path=ppt/slides/slide17.xml><?xml version="1.0" encoding="utf-8"?>
+<file path=ppt/slides/slide16.xml><?xml version="1.0" encoding="utf-8"?>
 <p:sld xmlns:a="http://schemas.openxmlformats.org/drawingml/2006/main" xmlns:r="http://schemas.openxmlformats.org/officeDocument/2006/relationships" xmlns:p="http://schemas.openxmlformats.org/presentationml/2006/main">
   <p:cSld>
     <p:spTree>
@@ -12348,7 +12271,7 @@
 </p:sld>
 </file>
 
-<file path=ppt/slides/slide18.xml><?xml version="1.0" encoding="utf-8"?>
+<file path=ppt/slides/slide17.xml><?xml version="1.0" encoding="utf-8"?>
 <p:sld xmlns:a="http://schemas.openxmlformats.org/drawingml/2006/main" xmlns:r="http://schemas.openxmlformats.org/officeDocument/2006/relationships" xmlns:p="http://schemas.openxmlformats.org/presentationml/2006/main">
   <p:cSld>
     <p:spTree>
@@ -12555,7 +12478,7 @@
 </p:sld>
 </file>
 
-<file path=ppt/slides/slide19.xml><?xml version="1.0" encoding="utf-8"?>
+<file path=ppt/slides/slide18.xml><?xml version="1.0" encoding="utf-8"?>
 <p:sld xmlns:a="http://schemas.openxmlformats.org/drawingml/2006/main" xmlns:r="http://schemas.openxmlformats.org/officeDocument/2006/relationships" xmlns:p="http://schemas.openxmlformats.org/presentationml/2006/main">
   <p:cSld>
     <p:spTree>
@@ -12809,6 +12732,472 @@
     <p:extLst>
       <p:ext uri="{BB962C8B-B14F-4D97-AF65-F5344CB8AC3E}">
         <p14:creationId xmlns:p14="http://schemas.microsoft.com/office/powerpoint/2010/main" val="1037888392"/>
+      </p:ext>
+    </p:extLst>
+  </p:cSld>
+  <p:clrMapOvr>
+    <a:masterClrMapping/>
+  </p:clrMapOvr>
+</p:sld>
+</file>
+
+<file path=ppt/slides/slide19.xml><?xml version="1.0" encoding="utf-8"?>
+<p:sld xmlns:a="http://schemas.openxmlformats.org/drawingml/2006/main" xmlns:r="http://schemas.openxmlformats.org/officeDocument/2006/relationships" xmlns:p="http://schemas.openxmlformats.org/presentationml/2006/main">
+  <p:cSld>
+    <p:spTree>
+      <p:nvGrpSpPr>
+        <p:cNvPr id="1" name="">
+          <a:extLst>
+            <a:ext uri="{FF2B5EF4-FFF2-40B4-BE49-F238E27FC236}">
+              <a16:creationId xmlns:a16="http://schemas.microsoft.com/office/drawing/2014/main" id="{52BE6D3D-5A2A-C63D-2E0A-A4EE6F9F361A}"/>
+            </a:ext>
+          </a:extLst>
+        </p:cNvPr>
+        <p:cNvGrpSpPr/>
+        <p:nvPr/>
+      </p:nvGrpSpPr>
+      <p:grpSpPr>
+        <a:xfrm>
+          <a:off x="0" y="0"/>
+          <a:ext cx="0" cy="0"/>
+          <a:chOff x="0" y="0"/>
+          <a:chExt cx="0" cy="0"/>
+        </a:xfrm>
+      </p:grpSpPr>
+      <p:sp>
+        <p:nvSpPr>
+          <p:cNvPr id="5" name="テキスト プレースホルダー 4">
+            <a:extLst>
+              <a:ext uri="{FF2B5EF4-FFF2-40B4-BE49-F238E27FC236}">
+                <a16:creationId xmlns:a16="http://schemas.microsoft.com/office/drawing/2014/main" id="{65A2D6F5-BBB8-F177-C56D-9D5D86E3EC77}"/>
+              </a:ext>
+            </a:extLst>
+          </p:cNvPr>
+          <p:cNvSpPr>
+            <a:spLocks noGrp="1"/>
+          </p:cNvSpPr>
+          <p:nvPr>
+            <p:ph type="body" idx="1"/>
+          </p:nvPr>
+        </p:nvSpPr>
+        <p:spPr>
+          <a:xfrm>
+            <a:off x="427383" y="1948996"/>
+            <a:ext cx="10515600" cy="4515304"/>
+          </a:xfrm>
+        </p:spPr>
+        <p:txBody>
+          <a:bodyPr>
+            <a:normAutofit fontScale="92500" lnSpcReduction="20000"/>
+          </a:bodyPr>
+          <a:lstStyle/>
+          <a:p>
+            <a:pPr>
+              <a:lnSpc>
+                <a:spcPct val="120000"/>
+              </a:lnSpc>
+            </a:pPr>
+            <a:r>
+              <a:rPr lang="en-US" altLang="ja-JP" dirty="0"/>
+              <a:t>#define </a:t>
+            </a:r>
+            <a:r>
+              <a:rPr lang="ja-JP" altLang="en-US" dirty="0"/>
+              <a:t>好きな名前 文字列：</a:t>
+            </a:r>
+            <a:r>
+              <a:rPr lang="ja-JP" altLang="en-US" dirty="0">
+                <a:solidFill>
+                  <a:schemeClr val="tx2">
+                    <a:lumMod val="75000"/>
+                  </a:schemeClr>
+                </a:solidFill>
+              </a:rPr>
+              <a:t>下のコードで設定した名前を打つと指定した文字列として認識する（数学の定数的な考え方）</a:t>
+            </a:r>
+            <a:endParaRPr lang="en-US" altLang="ja-JP" dirty="0">
+              <a:solidFill>
+                <a:schemeClr val="tx2">
+                  <a:lumMod val="75000"/>
+                </a:schemeClr>
+              </a:solidFill>
+            </a:endParaRPr>
+          </a:p>
+          <a:p>
+            <a:pPr marL="114300" indent="0">
+              <a:lnSpc>
+                <a:spcPct val="120000"/>
+              </a:lnSpc>
+              <a:buNone/>
+            </a:pPr>
+            <a:r>
+              <a:rPr lang="ja-JP" altLang="en-US" dirty="0">
+                <a:solidFill>
+                  <a:schemeClr val="tx2">
+                    <a:lumMod val="75000"/>
+                  </a:schemeClr>
+                </a:solidFill>
+              </a:rPr>
+              <a:t>　→これで</a:t>
+            </a:r>
+            <a:r>
+              <a:rPr lang="en-US" altLang="ja-JP" dirty="0">
+                <a:solidFill>
+                  <a:schemeClr val="tx2">
+                    <a:lumMod val="75000"/>
+                  </a:schemeClr>
+                </a:solidFill>
+              </a:rPr>
+              <a:t>LED</a:t>
+            </a:r>
+            <a:r>
+              <a:rPr lang="ja-JP" altLang="en-US" dirty="0">
+                <a:solidFill>
+                  <a:schemeClr val="tx2">
+                    <a:lumMod val="75000"/>
+                  </a:schemeClr>
+                </a:solidFill>
+              </a:rPr>
+              <a:t>のピン番号を指定しよう</a:t>
+            </a:r>
+            <a:endParaRPr lang="en-US" altLang="ja-JP" dirty="0">
+              <a:solidFill>
+                <a:schemeClr val="tx2">
+                  <a:lumMod val="75000"/>
+                </a:schemeClr>
+              </a:solidFill>
+            </a:endParaRPr>
+          </a:p>
+          <a:p>
+            <a:pPr>
+              <a:lnSpc>
+                <a:spcPct val="120000"/>
+              </a:lnSpc>
+            </a:pPr>
+            <a:r>
+              <a:rPr lang="en-US" altLang="ja-JP" dirty="0" err="1"/>
+              <a:t>pinMode</a:t>
+            </a:r>
+            <a:r>
+              <a:rPr lang="en-US" altLang="ja-JP" dirty="0"/>
+              <a:t>(</a:t>
+            </a:r>
+            <a:r>
+              <a:rPr lang="ja-JP" altLang="en-US" dirty="0"/>
+              <a:t>ピン番号、設定</a:t>
+            </a:r>
+            <a:r>
+              <a:rPr lang="en-US" altLang="ja-JP" dirty="0"/>
+              <a:t>):</a:t>
+            </a:r>
+            <a:r>
+              <a:rPr lang="ja-JP" altLang="en-US" dirty="0">
+                <a:solidFill>
+                  <a:schemeClr val="tx2">
+                    <a:lumMod val="75000"/>
+                  </a:schemeClr>
+                </a:solidFill>
+              </a:rPr>
+              <a:t>指定したピン番号のピンを</a:t>
+            </a:r>
+            <a:r>
+              <a:rPr lang="en-US" altLang="ja-JP" dirty="0">
+                <a:solidFill>
+                  <a:schemeClr val="tx2">
+                    <a:lumMod val="75000"/>
+                  </a:schemeClr>
+                </a:solidFill>
+              </a:rPr>
+              <a:t>OUTPUT</a:t>
+            </a:r>
+            <a:r>
+              <a:rPr lang="ja-JP" altLang="en-US" dirty="0">
+                <a:solidFill>
+                  <a:schemeClr val="tx2">
+                    <a:lumMod val="75000"/>
+                  </a:schemeClr>
+                </a:solidFill>
+              </a:rPr>
+              <a:t>や</a:t>
+            </a:r>
+            <a:r>
+              <a:rPr lang="en-US" altLang="ja-JP" dirty="0">
+                <a:solidFill>
+                  <a:schemeClr val="tx2">
+                    <a:lumMod val="75000"/>
+                  </a:schemeClr>
+                </a:solidFill>
+              </a:rPr>
+              <a:t>INPUT</a:t>
+            </a:r>
+            <a:r>
+              <a:rPr lang="ja-JP" altLang="en-US" dirty="0">
+                <a:solidFill>
+                  <a:schemeClr val="tx2">
+                    <a:lumMod val="75000"/>
+                  </a:schemeClr>
+                </a:solidFill>
+              </a:rPr>
+              <a:t>に設定する</a:t>
+            </a:r>
+            <a:endParaRPr lang="en-US" altLang="ja-JP" dirty="0">
+              <a:solidFill>
+                <a:schemeClr val="tx2">
+                  <a:lumMod val="75000"/>
+                </a:schemeClr>
+              </a:solidFill>
+            </a:endParaRPr>
+          </a:p>
+          <a:p>
+            <a:pPr>
+              <a:lnSpc>
+                <a:spcPct val="120000"/>
+              </a:lnSpc>
+            </a:pPr>
+            <a:r>
+              <a:rPr lang="en-US" altLang="ja-JP" dirty="0">
+                <a:solidFill>
+                  <a:schemeClr val="tx2">
+                    <a:lumMod val="75000"/>
+                  </a:schemeClr>
+                </a:solidFill>
+              </a:rPr>
+              <a:t>OUTPUT:</a:t>
+            </a:r>
+            <a:r>
+              <a:rPr lang="ja-JP" altLang="en-US" dirty="0">
+                <a:solidFill>
+                  <a:schemeClr val="tx2">
+                    <a:lumMod val="75000"/>
+                  </a:schemeClr>
+                </a:solidFill>
+              </a:rPr>
+              <a:t>電圧を出す　</a:t>
+            </a:r>
+            <a:r>
+              <a:rPr lang="en-US" altLang="ja-JP" dirty="0">
+                <a:solidFill>
+                  <a:schemeClr val="tx2">
+                    <a:lumMod val="75000"/>
+                  </a:schemeClr>
+                </a:solidFill>
+              </a:rPr>
+              <a:t>INPUT:</a:t>
+            </a:r>
+            <a:r>
+              <a:rPr lang="ja-JP" altLang="en-US" dirty="0">
+                <a:solidFill>
+                  <a:schemeClr val="tx2">
+                    <a:lumMod val="75000"/>
+                  </a:schemeClr>
+                </a:solidFill>
+              </a:rPr>
+              <a:t>電圧を読み取る</a:t>
+            </a:r>
+            <a:endParaRPr lang="en-US" altLang="ja-JP" dirty="0">
+              <a:solidFill>
+                <a:schemeClr val="tx2">
+                  <a:lumMod val="75000"/>
+                </a:schemeClr>
+              </a:solidFill>
+            </a:endParaRPr>
+          </a:p>
+          <a:p>
+            <a:pPr>
+              <a:lnSpc>
+                <a:spcPct val="120000"/>
+              </a:lnSpc>
+            </a:pPr>
+            <a:r>
+              <a:rPr lang="en-US" altLang="ja-JP" dirty="0" err="1"/>
+              <a:t>digitalWrite</a:t>
+            </a:r>
+            <a:r>
+              <a:rPr lang="en-US" altLang="ja-JP" dirty="0"/>
+              <a:t>(</a:t>
+            </a:r>
+            <a:r>
+              <a:rPr lang="ja-JP" altLang="en-US" dirty="0"/>
+              <a:t>ピン番号、</a:t>
+            </a:r>
+            <a:r>
+              <a:rPr lang="en-US" altLang="ja-JP" dirty="0"/>
+              <a:t>HIGH or LOW):</a:t>
+            </a:r>
+            <a:r>
+              <a:rPr lang="ja-JP" altLang="en-US" dirty="0">
+                <a:solidFill>
+                  <a:schemeClr val="tx2">
+                    <a:lumMod val="75000"/>
+                  </a:schemeClr>
+                </a:solidFill>
+              </a:rPr>
+              <a:t>指定したピン番号のピンから</a:t>
+            </a:r>
+            <a:r>
+              <a:rPr lang="en-US" altLang="ja-JP" dirty="0">
+                <a:solidFill>
+                  <a:schemeClr val="tx2">
+                    <a:lumMod val="75000"/>
+                  </a:schemeClr>
+                </a:solidFill>
+              </a:rPr>
+              <a:t>HIGH(3.3V)</a:t>
+            </a:r>
+            <a:r>
+              <a:rPr lang="en-US" altLang="ja-JP" dirty="0" err="1">
+                <a:solidFill>
+                  <a:schemeClr val="tx2">
+                    <a:lumMod val="75000"/>
+                  </a:schemeClr>
+                </a:solidFill>
+              </a:rPr>
+              <a:t>orLOW</a:t>
+            </a:r>
+            <a:r>
+              <a:rPr lang="en-US" altLang="ja-JP" dirty="0">
+                <a:solidFill>
+                  <a:schemeClr val="tx2">
+                    <a:lumMod val="75000"/>
+                  </a:schemeClr>
+                </a:solidFill>
+              </a:rPr>
+              <a:t>(0V)</a:t>
+            </a:r>
+            <a:r>
+              <a:rPr lang="ja-JP" altLang="en-US" dirty="0">
+                <a:solidFill>
+                  <a:schemeClr val="tx2">
+                    <a:lumMod val="75000"/>
+                  </a:schemeClr>
+                </a:solidFill>
+              </a:rPr>
+              <a:t>の電圧を出す</a:t>
+            </a:r>
+            <a:endParaRPr lang="en-US" altLang="ja-JP" dirty="0">
+              <a:solidFill>
+                <a:schemeClr val="tx2">
+                  <a:lumMod val="75000"/>
+                </a:schemeClr>
+              </a:solidFill>
+            </a:endParaRPr>
+          </a:p>
+          <a:p>
+            <a:pPr>
+              <a:lnSpc>
+                <a:spcPct val="120000"/>
+              </a:lnSpc>
+            </a:pPr>
+            <a:r>
+              <a:rPr lang="en-US" altLang="ja-JP" dirty="0"/>
+              <a:t>delay(</a:t>
+            </a:r>
+            <a:r>
+              <a:rPr lang="ja-JP" altLang="en-US" dirty="0"/>
+              <a:t>ミリ秒</a:t>
+            </a:r>
+            <a:r>
+              <a:rPr lang="en-US" altLang="ja-JP" dirty="0"/>
+              <a:t>):</a:t>
+            </a:r>
+            <a:r>
+              <a:rPr lang="ja-JP" altLang="en-US" dirty="0">
+                <a:solidFill>
+                  <a:schemeClr val="tx2">
+                    <a:lumMod val="75000"/>
+                  </a:schemeClr>
+                </a:solidFill>
+              </a:rPr>
+              <a:t>指定したミリ秒だけ待機する</a:t>
+            </a:r>
+            <a:endParaRPr lang="en-US" altLang="ja-JP" dirty="0">
+              <a:solidFill>
+                <a:schemeClr val="tx2">
+                  <a:lumMod val="75000"/>
+                </a:schemeClr>
+              </a:solidFill>
+            </a:endParaRPr>
+          </a:p>
+        </p:txBody>
+      </p:sp>
+      <p:sp>
+        <p:nvSpPr>
+          <p:cNvPr id="10" name="テキスト プレースホルダー 9">
+            <a:extLst>
+              <a:ext uri="{FF2B5EF4-FFF2-40B4-BE49-F238E27FC236}">
+                <a16:creationId xmlns:a16="http://schemas.microsoft.com/office/drawing/2014/main" id="{2D16FD25-64CE-E182-5E51-24098F08408A}"/>
+              </a:ext>
+            </a:extLst>
+          </p:cNvPr>
+          <p:cNvSpPr>
+            <a:spLocks noGrp="1"/>
+          </p:cNvSpPr>
+          <p:nvPr>
+            <p:ph type="body" idx="13"/>
+          </p:nvPr>
+        </p:nvSpPr>
+        <p:spPr>
+          <a:xfrm>
+            <a:off x="427383" y="1237931"/>
+            <a:ext cx="10515600" cy="711064"/>
+          </a:xfrm>
+        </p:spPr>
+        <p:txBody>
+          <a:bodyPr/>
+          <a:lstStyle/>
+          <a:p>
+            <a:r>
+              <a:rPr lang="ja-JP" altLang="en-US" dirty="0">
+                <a:solidFill>
+                  <a:schemeClr val="accent6"/>
+                </a:solidFill>
+              </a:rPr>
+              <a:t>使う関数</a:t>
+            </a:r>
+          </a:p>
+        </p:txBody>
+      </p:sp>
+      <p:sp>
+        <p:nvSpPr>
+          <p:cNvPr id="4" name="タイトル 3">
+            <a:extLst>
+              <a:ext uri="{FF2B5EF4-FFF2-40B4-BE49-F238E27FC236}">
+                <a16:creationId xmlns:a16="http://schemas.microsoft.com/office/drawing/2014/main" id="{28FB67F3-E5FB-E89B-B95E-47A05D92E264}"/>
+              </a:ext>
+            </a:extLst>
+          </p:cNvPr>
+          <p:cNvSpPr>
+            <a:spLocks noGrp="1"/>
+          </p:cNvSpPr>
+          <p:nvPr>
+            <p:ph type="title"/>
+          </p:nvPr>
+        </p:nvSpPr>
+        <p:spPr>
+          <a:xfrm>
+            <a:off x="427383" y="266699"/>
+            <a:ext cx="8844804" cy="755451"/>
+          </a:xfrm>
+        </p:spPr>
+        <p:txBody>
+          <a:bodyPr/>
+          <a:lstStyle/>
+          <a:p>
+            <a:r>
+              <a:rPr lang="en-US" altLang="ja-JP" dirty="0"/>
+              <a:t>LED</a:t>
+            </a:r>
+            <a:r>
+              <a:rPr lang="ja-JP" altLang="en-US" dirty="0"/>
+              <a:t>をピカピカ光らせよう</a:t>
+            </a:r>
+          </a:p>
+        </p:txBody>
+      </p:sp>
+    </p:spTree>
+    <p:extLst>
+      <p:ext uri="{BB962C8B-B14F-4D97-AF65-F5344CB8AC3E}">
+        <p14:creationId xmlns:p14="http://schemas.microsoft.com/office/powerpoint/2010/main" val="3616372496"/>
       </p:ext>
     </p:extLst>
   </p:cSld>
@@ -12985,13 +13374,13 @@
         </p:nvSpPr>
         <p:spPr>
           <a:xfrm>
-            <a:off x="427383" y="1948996"/>
-            <a:ext cx="10515600" cy="4515304"/>
+            <a:off x="427383" y="1161143"/>
+            <a:ext cx="10515600" cy="5843956"/>
           </a:xfrm>
         </p:spPr>
         <p:txBody>
           <a:bodyPr>
-            <a:normAutofit fontScale="92500" lnSpcReduction="20000"/>
+            <a:normAutofit fontScale="85000" lnSpcReduction="20000"/>
           </a:bodyPr>
           <a:lstStyle/>
           <a:p>
@@ -13002,11 +13391,11 @@
             </a:pPr>
             <a:r>
               <a:rPr lang="en-US" altLang="ja-JP" dirty="0"/>
-              <a:t>#define </a:t>
+              <a:t>switch</a:t>
             </a:r>
             <a:r>
               <a:rPr lang="ja-JP" altLang="en-US" dirty="0"/>
-              <a:t>好きな名前 文字列：</a:t>
+              <a:t>：</a:t>
             </a:r>
             <a:r>
               <a:rPr lang="ja-JP" altLang="en-US" dirty="0">
@@ -13016,7 +13405,7 @@
                   </a:schemeClr>
                 </a:solidFill>
               </a:rPr>
-              <a:t>下のコードで設定した名前を打つと指定した文字列として認識する（数学の定数的な考え方）</a:t>
+              <a:t>指定した変数の値によっ</a:t>
             </a:r>
             <a:endParaRPr lang="en-US" altLang="ja-JP" dirty="0">
               <a:solidFill>
@@ -13041,7 +13430,7 @@
                   </a:schemeClr>
                 </a:solidFill>
               </a:rPr>
-              <a:t>　→これで</a:t>
+              <a:t> て</a:t>
             </a:r>
             <a:r>
               <a:rPr lang="en-US" altLang="ja-JP" dirty="0">
@@ -13051,7 +13440,7 @@
                   </a:schemeClr>
                 </a:solidFill>
               </a:rPr>
-              <a:t>LED</a:t>
+              <a:t>,</a:t>
             </a:r>
             <a:r>
               <a:rPr lang="ja-JP" altLang="en-US" dirty="0">
@@ -13061,7 +13450,7 @@
                   </a:schemeClr>
                 </a:solidFill>
               </a:rPr>
-              <a:t>のピン番号を指定しよう</a:t>
+              <a:t>処理を実行する</a:t>
             </a:r>
             <a:endParaRPr lang="en-US" altLang="ja-JP" dirty="0">
               <a:solidFill>
@@ -13072,67 +13461,99 @@
             </a:endParaRPr>
           </a:p>
           <a:p>
-            <a:pPr>
+            <a:pPr marL="114300" indent="0">
               <a:lnSpc>
                 <a:spcPct val="120000"/>
               </a:lnSpc>
+              <a:buNone/>
             </a:pPr>
-            <a:r>
-              <a:rPr lang="en-US" altLang="ja-JP" dirty="0" err="1"/>
-              <a:t>pinMode</a:t>
-            </a:r>
-            <a:r>
-              <a:rPr lang="en-US" altLang="ja-JP" dirty="0"/>
-              <a:t>(</a:t>
-            </a:r>
-            <a:r>
-              <a:rPr lang="ja-JP" altLang="en-US" dirty="0"/>
-              <a:t>ピン番号、設定</a:t>
-            </a:r>
-            <a:r>
-              <a:rPr lang="en-US" altLang="ja-JP" dirty="0"/>
-              <a:t>):</a:t>
-            </a:r>
+            <a:endParaRPr lang="en-US" altLang="ja-JP" dirty="0">
+              <a:solidFill>
+                <a:schemeClr val="accent6"/>
+              </a:solidFill>
+            </a:endParaRPr>
+          </a:p>
+          <a:p>
+            <a:pPr marL="114300" indent="0">
+              <a:lnSpc>
+                <a:spcPct val="120000"/>
+              </a:lnSpc>
+              <a:buNone/>
+            </a:pPr>
             <a:r>
               <a:rPr lang="ja-JP" altLang="en-US" dirty="0">
+                <a:solidFill>
+                  <a:schemeClr val="accent6"/>
+                </a:solidFill>
+              </a:rPr>
+              <a:t>シリアル通信について</a:t>
+            </a:r>
+            <a:endParaRPr lang="en-US" altLang="ja-JP" dirty="0">
+              <a:solidFill>
+                <a:schemeClr val="accent6"/>
+              </a:solidFill>
+            </a:endParaRPr>
+          </a:p>
+          <a:p>
+            <a:pPr marL="114300" indent="0">
+              <a:lnSpc>
+                <a:spcPct val="120000"/>
+              </a:lnSpc>
+              <a:buNone/>
+            </a:pPr>
+            <a:r>
+              <a:rPr lang="en-US" altLang="ja-JP" dirty="0">
                 <a:solidFill>
                   <a:schemeClr val="tx2">
                     <a:lumMod val="75000"/>
                   </a:schemeClr>
                 </a:solidFill>
               </a:rPr>
-              <a:t>指定したピン番号のピンを</a:t>
-            </a:r>
-            <a:r>
-              <a:rPr lang="en-US" altLang="ja-JP" dirty="0">
+              <a:t>PC</a:t>
+            </a:r>
+            <a:r>
+              <a:rPr lang="ja-JP" altLang="en-US" dirty="0">
                 <a:solidFill>
                   <a:schemeClr val="tx2">
                     <a:lumMod val="75000"/>
                   </a:schemeClr>
                 </a:solidFill>
               </a:rPr>
-              <a:t>OUTPUT</a:t>
-            </a:r>
-            <a:r>
-              <a:rPr lang="ja-JP" altLang="en-US" dirty="0">
+              <a:t>とマイコン</a:t>
+            </a:r>
+            <a:r>
+              <a:rPr lang="en-US" altLang="ja-JP" dirty="0">
                 <a:solidFill>
                   <a:schemeClr val="tx2">
                     <a:lumMod val="75000"/>
                   </a:schemeClr>
                 </a:solidFill>
               </a:rPr>
-              <a:t>や</a:t>
-            </a:r>
-            <a:r>
-              <a:rPr lang="en-US" altLang="ja-JP" dirty="0">
+              <a:t>(ESP32-S3)</a:t>
+            </a:r>
+            <a:r>
+              <a:rPr lang="ja-JP" altLang="en-US" dirty="0">
                 <a:solidFill>
                   <a:schemeClr val="tx2">
                     <a:lumMod val="75000"/>
                   </a:schemeClr>
                 </a:solidFill>
               </a:rPr>
-              <a:t>INPUT</a:t>
-            </a:r>
+              <a:t>間の通信</a:t>
+            </a:r>
+            <a:endParaRPr lang="en-US" altLang="ja-JP" dirty="0">
+              <a:solidFill>
+                <a:schemeClr val="accent6"/>
+              </a:solidFill>
+            </a:endParaRPr>
+          </a:p>
+          <a:p>
+            <a:pPr marL="114300" indent="0">
+              <a:lnSpc>
+                <a:spcPct val="120000"/>
+              </a:lnSpc>
+              <a:buNone/>
+            </a:pPr>
             <a:r>
               <a:rPr lang="ja-JP" altLang="en-US" dirty="0">
                 <a:solidFill>
@@ -13141,7 +13562,7 @@
                   </a:schemeClr>
                 </a:solidFill>
               </a:rPr>
-              <a:t>に設定する</a:t>
+              <a:t>マイコンから受け取った値や文字を</a:t>
             </a:r>
             <a:endParaRPr lang="en-US" altLang="ja-JP" dirty="0">
               <a:solidFill>
@@ -13152,50 +13573,21 @@
             </a:endParaRPr>
           </a:p>
           <a:p>
-            <a:pPr>
+            <a:pPr marL="114300" indent="0">
               <a:lnSpc>
                 <a:spcPct val="120000"/>
               </a:lnSpc>
+              <a:buNone/>
             </a:pPr>
             <a:r>
-              <a:rPr lang="en-US" altLang="ja-JP" dirty="0">
+              <a:rPr lang="ja-JP" altLang="en-US" dirty="0">
                 <a:solidFill>
                   <a:schemeClr val="tx2">
                     <a:lumMod val="75000"/>
                   </a:schemeClr>
                 </a:solidFill>
               </a:rPr>
-              <a:t>OUTPUT:</a:t>
-            </a:r>
-            <a:r>
-              <a:rPr lang="ja-JP" altLang="en-US" dirty="0">
-                <a:solidFill>
-                  <a:schemeClr val="tx2">
-                    <a:lumMod val="75000"/>
-                  </a:schemeClr>
-                </a:solidFill>
-              </a:rPr>
-              <a:t>電圧を出す　</a:t>
-            </a:r>
-            <a:r>
-              <a:rPr lang="en-US" altLang="ja-JP" dirty="0">
-                <a:solidFill>
-                  <a:schemeClr val="tx2">
-                    <a:lumMod val="75000"/>
-                  </a:schemeClr>
-                </a:solidFill>
-              </a:rPr>
-              <a:t>INPUT:</a:t>
-            </a:r>
-            <a:r>
-              <a:rPr lang="ja-JP" altLang="en-US" dirty="0">
-                <a:solidFill>
-                  <a:schemeClr val="tx2">
-                    <a:lumMod val="75000"/>
-                  </a:schemeClr>
-                </a:solidFill>
-              </a:rPr>
-              <a:t>電圧を読み取る</a:t>
+              <a:t>パソコンで表示する</a:t>
             </a:r>
             <a:endParaRPr lang="en-US" altLang="ja-JP" dirty="0">
               <a:solidFill>
@@ -13206,77 +13598,12 @@
             </a:endParaRPr>
           </a:p>
           <a:p>
-            <a:pPr>
+            <a:pPr marL="114300" indent="0">
               <a:lnSpc>
                 <a:spcPct val="120000"/>
               </a:lnSpc>
+              <a:buNone/>
             </a:pPr>
-            <a:r>
-              <a:rPr lang="en-US" altLang="ja-JP" dirty="0" err="1"/>
-              <a:t>digitalWrite</a:t>
-            </a:r>
-            <a:r>
-              <a:rPr lang="en-US" altLang="ja-JP" dirty="0"/>
-              <a:t>(</a:t>
-            </a:r>
-            <a:r>
-              <a:rPr lang="ja-JP" altLang="en-US" dirty="0"/>
-              <a:t>ピン番号、</a:t>
-            </a:r>
-            <a:r>
-              <a:rPr lang="en-US" altLang="ja-JP" dirty="0"/>
-              <a:t>HIGH or LOW):</a:t>
-            </a:r>
-            <a:r>
-              <a:rPr lang="ja-JP" altLang="en-US" dirty="0">
-                <a:solidFill>
-                  <a:schemeClr val="tx2">
-                    <a:lumMod val="75000"/>
-                  </a:schemeClr>
-                </a:solidFill>
-              </a:rPr>
-              <a:t>指定したピン番号のピンから</a:t>
-            </a:r>
-            <a:r>
-              <a:rPr lang="en-US" altLang="ja-JP" dirty="0">
-                <a:solidFill>
-                  <a:schemeClr val="tx2">
-                    <a:lumMod val="75000"/>
-                  </a:schemeClr>
-                </a:solidFill>
-              </a:rPr>
-              <a:t>HIGH(3.3V)</a:t>
-            </a:r>
-            <a:r>
-              <a:rPr lang="en-US" altLang="ja-JP" dirty="0" err="1">
-                <a:solidFill>
-                  <a:schemeClr val="tx2">
-                    <a:lumMod val="75000"/>
-                  </a:schemeClr>
-                </a:solidFill>
-              </a:rPr>
-              <a:t>orLOW</a:t>
-            </a:r>
-            <a:r>
-              <a:rPr lang="en-US" altLang="ja-JP" dirty="0">
-                <a:solidFill>
-                  <a:schemeClr val="tx2">
-                    <a:lumMod val="75000"/>
-                  </a:schemeClr>
-                </a:solidFill>
-              </a:rPr>
-              <a:t>(0V)</a:t>
-            </a:r>
-            <a:r>
-              <a:rPr lang="ja-JP" altLang="en-US" dirty="0">
-                <a:solidFill>
-                  <a:schemeClr val="tx2">
-                    <a:lumMod val="75000"/>
-                  </a:schemeClr>
-                </a:solidFill>
-              </a:rPr>
-              <a:t>の電圧を出す</a:t>
-            </a:r>
             <a:endParaRPr lang="en-US" altLang="ja-JP" dirty="0">
               <a:solidFill>
                 <a:schemeClr val="tx2">
@@ -13293,11 +13620,11 @@
             </a:pPr>
             <a:r>
               <a:rPr lang="en-US" altLang="ja-JP" dirty="0"/>
-              <a:t>delay(</a:t>
+              <a:t>Int (</a:t>
             </a:r>
             <a:r>
               <a:rPr lang="ja-JP" altLang="en-US" dirty="0"/>
-              <a:t>ミリ秒</a:t>
+              <a:t>変数名</a:t>
             </a:r>
             <a:r>
               <a:rPr lang="en-US" altLang="ja-JP" dirty="0"/>
@@ -13311,7 +13638,7 @@
                   </a:schemeClr>
                 </a:solidFill>
               </a:rPr>
-              <a:t>指定したミリ秒だけ待機する</a:t>
+              <a:t>整数を入れられる変数</a:t>
             </a:r>
             <a:endParaRPr lang="en-US" altLang="ja-JP" dirty="0">
               <a:solidFill>
@@ -13320,6 +13647,124 @@
                 </a:schemeClr>
               </a:solidFill>
             </a:endParaRPr>
+          </a:p>
+          <a:p>
+            <a:pPr>
+              <a:lnSpc>
+                <a:spcPct val="120000"/>
+              </a:lnSpc>
+            </a:pPr>
+            <a:r>
+              <a:rPr lang="en-US" altLang="ja-JP" dirty="0"/>
+              <a:t>bool (</a:t>
+            </a:r>
+            <a:r>
+              <a:rPr lang="ja-JP" altLang="en-US" dirty="0"/>
+              <a:t>変数名</a:t>
+            </a:r>
+            <a:r>
+              <a:rPr lang="en-US" altLang="ja-JP" dirty="0"/>
+              <a:t>):</a:t>
+            </a:r>
+            <a:r>
+              <a:rPr lang="ja-JP" altLang="en-US" dirty="0">
+                <a:solidFill>
+                  <a:schemeClr val="tx2">
+                    <a:lumMod val="75000"/>
+                  </a:schemeClr>
+                </a:solidFill>
+              </a:rPr>
+              <a:t>真</a:t>
+            </a:r>
+            <a:r>
+              <a:rPr lang="en-US" altLang="ja-JP" dirty="0">
+                <a:solidFill>
+                  <a:schemeClr val="tx2">
+                    <a:lumMod val="75000"/>
+                  </a:schemeClr>
+                </a:solidFill>
+              </a:rPr>
+              <a:t>(true)</a:t>
+            </a:r>
+            <a:r>
+              <a:rPr lang="ja-JP" altLang="en-US" dirty="0">
+                <a:solidFill>
+                  <a:schemeClr val="tx2">
+                    <a:lumMod val="75000"/>
+                  </a:schemeClr>
+                </a:solidFill>
+              </a:rPr>
+              <a:t>か偽</a:t>
+            </a:r>
+            <a:r>
+              <a:rPr lang="en-US" altLang="ja-JP" dirty="0">
+                <a:solidFill>
+                  <a:schemeClr val="tx2">
+                    <a:lumMod val="75000"/>
+                  </a:schemeClr>
+                </a:solidFill>
+              </a:rPr>
+              <a:t>(false)</a:t>
+            </a:r>
+            <a:r>
+              <a:rPr lang="ja-JP" altLang="en-US" dirty="0">
+                <a:solidFill>
+                  <a:schemeClr val="tx2">
+                    <a:lumMod val="75000"/>
+                  </a:schemeClr>
+                </a:solidFill>
+              </a:rPr>
+              <a:t>を入れられる変数</a:t>
+            </a:r>
+            <a:r>
+              <a:rPr lang="en-US" altLang="ja-JP" dirty="0">
+                <a:solidFill>
+                  <a:schemeClr val="tx2">
+                    <a:lumMod val="75000"/>
+                  </a:schemeClr>
+                </a:solidFill>
+              </a:rPr>
+              <a:t>(ex, false, true)</a:t>
+            </a:r>
+          </a:p>
+          <a:p>
+            <a:pPr>
+              <a:lnSpc>
+                <a:spcPct val="120000"/>
+              </a:lnSpc>
+            </a:pPr>
+            <a:r>
+              <a:rPr lang="en-US" altLang="ja-JP" dirty="0"/>
+              <a:t>char (</a:t>
+            </a:r>
+            <a:r>
+              <a:rPr lang="ja-JP" altLang="en-US" dirty="0"/>
+              <a:t>変数名</a:t>
+            </a:r>
+            <a:r>
+              <a:rPr lang="en-US" altLang="ja-JP" dirty="0"/>
+              <a:t>):</a:t>
+            </a:r>
+            <a:r>
+              <a:rPr lang="ja-JP" altLang="en-US" dirty="0">
+                <a:solidFill>
+                  <a:schemeClr val="tx2">
+                    <a:lumMod val="75000"/>
+                  </a:schemeClr>
+                </a:solidFill>
+              </a:rPr>
+              <a:t>一文字を入れられる変数</a:t>
+            </a:r>
+            <a:r>
+              <a:rPr lang="en-US" altLang="ja-JP" dirty="0">
+                <a:solidFill>
+                  <a:schemeClr val="tx2">
+                    <a:lumMod val="75000"/>
+                  </a:schemeClr>
+                </a:solidFill>
+              </a:rPr>
+              <a:t>(ex, ‘a’)</a:t>
+            </a:r>
           </a:p>
         </p:txBody>
       </p:sp>
@@ -13341,21 +13786,23 @@
         </p:nvSpPr>
         <p:spPr>
           <a:xfrm>
-            <a:off x="427383" y="1237931"/>
+            <a:off x="423961" y="4715177"/>
             <a:ext cx="10515600" cy="711064"/>
           </a:xfrm>
         </p:spPr>
         <p:txBody>
-          <a:bodyPr/>
+          <a:bodyPr>
+            <a:normAutofit/>
+          </a:bodyPr>
           <a:lstStyle/>
           <a:p>
             <a:r>
-              <a:rPr lang="ja-JP" altLang="en-US" dirty="0">
+              <a:rPr lang="ja-JP" altLang="en-US" sz="2400" dirty="0">
                 <a:solidFill>
                   <a:schemeClr val="accent6"/>
                 </a:solidFill>
               </a:rPr>
-              <a:t>使う関数</a:t>
+              <a:t>変数</a:t>
             </a:r>
           </a:p>
         </p:txBody>
@@ -13397,10 +13844,70 @@
           </a:p>
         </p:txBody>
       </p:sp>
+      <p:pic>
+        <p:nvPicPr>
+          <p:cNvPr id="3" name="図 2">
+            <a:extLst>
+              <a:ext uri="{FF2B5EF4-FFF2-40B4-BE49-F238E27FC236}">
+                <a16:creationId xmlns:a16="http://schemas.microsoft.com/office/drawing/2014/main" id="{997482E7-FEFD-98BA-CB8B-C87AC9AE4357}"/>
+              </a:ext>
+            </a:extLst>
+          </p:cNvPr>
+          <p:cNvPicPr>
+            <a:picLocks noChangeAspect="1"/>
+          </p:cNvPicPr>
+          <p:nvPr/>
+        </p:nvPicPr>
+        <p:blipFill>
+          <a:blip r:embed="rId2"/>
+          <a:stretch>
+            <a:fillRect/>
+          </a:stretch>
+        </p:blipFill>
+        <p:spPr>
+          <a:xfrm>
+            <a:off x="5625243" y="1022150"/>
+            <a:ext cx="3504077" cy="1612012"/>
+          </a:xfrm>
+          <a:prstGeom prst="rect">
+            <a:avLst/>
+          </a:prstGeom>
+        </p:spPr>
+      </p:pic>
+      <p:pic>
+        <p:nvPicPr>
+          <p:cNvPr id="11" name="図 10" descr="Hello, World!&#10;&#10;AI 生成コンテンツは誤りを含む可能性があります。">
+            <a:extLst>
+              <a:ext uri="{FF2B5EF4-FFF2-40B4-BE49-F238E27FC236}">
+                <a16:creationId xmlns:a16="http://schemas.microsoft.com/office/drawing/2014/main" id="{88E1A0EB-2F8D-E115-E617-A8E0E7B8FCCD}"/>
+              </a:ext>
+            </a:extLst>
+          </p:cNvPr>
+          <p:cNvPicPr>
+            <a:picLocks noChangeAspect="1"/>
+          </p:cNvPicPr>
+          <p:nvPr/>
+        </p:nvPicPr>
+        <p:blipFill>
+          <a:blip r:embed="rId3"/>
+          <a:stretch>
+            <a:fillRect/>
+          </a:stretch>
+        </p:blipFill>
+        <p:spPr>
+          <a:xfrm>
+            <a:off x="5625242" y="2687598"/>
+            <a:ext cx="6182555" cy="2250162"/>
+          </a:xfrm>
+          <a:prstGeom prst="rect">
+            <a:avLst/>
+          </a:prstGeom>
+        </p:spPr>
+      </p:pic>
     </p:spTree>
     <p:extLst>
       <p:ext uri="{BB962C8B-B14F-4D97-AF65-F5344CB8AC3E}">
-        <p14:creationId xmlns:p14="http://schemas.microsoft.com/office/powerpoint/2010/main" val="3616372496"/>
+        <p14:creationId xmlns:p14="http://schemas.microsoft.com/office/powerpoint/2010/main" val="2864951520"/>
       </p:ext>
     </p:extLst>
   </p:cSld>
@@ -14155,7 +14662,7 @@
         </p:spPr>
         <p:txBody>
           <a:bodyPr>
-            <a:normAutofit lnSpcReduction="10000"/>
+            <a:normAutofit fontScale="92500" lnSpcReduction="10000"/>
           </a:bodyPr>
           <a:lstStyle/>
           <a:p>
@@ -14342,7 +14849,41 @@
             </a:r>
             <a:r>
               <a:rPr lang="ja-JP" altLang="en-US" sz="2400" dirty="0"/>
-              <a:t>か読める。あとは</a:t>
+              <a:t>か読める。</a:t>
+            </a:r>
+            <a:r>
+              <a:rPr lang="en-US" altLang="ja-JP" sz="2400" dirty="0"/>
+              <a:t>HIGH</a:t>
+            </a:r>
+            <a:r>
+              <a:rPr lang="ja-JP" altLang="en-US" sz="2400" dirty="0"/>
+              <a:t>の時</a:t>
+            </a:r>
+            <a:r>
+              <a:rPr lang="en-US" altLang="ja-JP" sz="2400" dirty="0"/>
+              <a:t>true, LOW</a:t>
+            </a:r>
+            <a:r>
+              <a:rPr lang="ja-JP" altLang="en-US" sz="2400" dirty="0"/>
+              <a:t>の時</a:t>
+            </a:r>
+            <a:r>
+              <a:rPr lang="en-US" altLang="ja-JP" sz="2400" dirty="0"/>
+              <a:t>false</a:t>
+            </a:r>
+            <a:r>
+              <a:rPr lang="ja-JP" altLang="en-US" sz="2400" dirty="0"/>
+              <a:t>になる。</a:t>
+            </a:r>
+            <a:endParaRPr lang="en-US" altLang="ja-JP" sz="2400" dirty="0"/>
+          </a:p>
+          <a:p>
+            <a:pPr marL="0" indent="0">
+              <a:buNone/>
+            </a:pPr>
+            <a:r>
+              <a:rPr lang="ja-JP" altLang="en-US" sz="2400" dirty="0"/>
+              <a:t>あとは</a:t>
             </a:r>
             <a:r>
               <a:rPr lang="en-US" altLang="ja-JP" sz="2400" dirty="0"/>
@@ -14433,12 +14974,12 @@
         <p:spPr>
           <a:xfrm>
             <a:off x="427383" y="1487228"/>
-            <a:ext cx="10515600" cy="3426799"/>
+            <a:ext cx="10515600" cy="4285419"/>
           </a:xfrm>
         </p:spPr>
         <p:txBody>
           <a:bodyPr>
-            <a:normAutofit lnSpcReduction="10000"/>
+            <a:normAutofit fontScale="92500" lnSpcReduction="20000"/>
           </a:bodyPr>
           <a:lstStyle/>
           <a:p>
@@ -14598,6 +15139,72 @@
               <a:rPr lang="ja-JP" altLang="en-US" sz="2400" dirty="0"/>
               <a:t>で読み取れる</a:t>
             </a:r>
+            <a:r>
+              <a:rPr lang="en-US" altLang="ja-JP" sz="2400" dirty="0"/>
+              <a:t>.</a:t>
+            </a:r>
+          </a:p>
+          <a:p>
+            <a:pPr marL="0" indent="0">
+              <a:buNone/>
+            </a:pPr>
+            <a:r>
+              <a:rPr lang="ja-JP" altLang="en-US" sz="2400" dirty="0"/>
+              <a:t>（使い方例：     </a:t>
+            </a:r>
+            <a:r>
+              <a:rPr lang="en-US" altLang="ja-JP" sz="2400" dirty="0"/>
+              <a:t>int example;</a:t>
+            </a:r>
+          </a:p>
+          <a:p>
+            <a:pPr marL="0" indent="0">
+              <a:buNone/>
+            </a:pPr>
+            <a:r>
+              <a:rPr lang="ja-JP" altLang="en-US" sz="2400" dirty="0"/>
+              <a:t>　　　　　     　</a:t>
+            </a:r>
+            <a:r>
+              <a:rPr lang="en-US" altLang="ja-JP" sz="2400" dirty="0"/>
+              <a:t>example = </a:t>
+            </a:r>
+            <a:r>
+              <a:rPr lang="en-US" altLang="ja-JP" sz="2400" dirty="0" err="1"/>
+              <a:t>analogRead</a:t>
+            </a:r>
+            <a:r>
+              <a:rPr lang="en-US" altLang="ja-JP" sz="2400" dirty="0"/>
+              <a:t>(Sensor);</a:t>
+            </a:r>
+            <a:r>
+              <a:rPr lang="ja-JP" altLang="en-US" sz="2400" dirty="0"/>
+              <a:t>　　　　　　　　）</a:t>
+            </a:r>
+            <a:endParaRPr lang="en-US" altLang="ja-JP" sz="2400" dirty="0"/>
+          </a:p>
+          <a:p>
+            <a:pPr marL="0" indent="0">
+              <a:buNone/>
+            </a:pPr>
+            <a:r>
+              <a:rPr lang="ja-JP" altLang="en-US" sz="2400" dirty="0"/>
+              <a:t>センサーの値が知りたかったら、シリアル通信をしてみようの目標</a:t>
+            </a:r>
+            <a:r>
+              <a:rPr lang="en-US" altLang="ja-JP" sz="2400" dirty="0"/>
+              <a:t>2</a:t>
+            </a:r>
+            <a:r>
+              <a:rPr lang="ja-JP" altLang="en-US" sz="2400" dirty="0"/>
+              <a:t>を参照（次のスライド）</a:t>
+            </a:r>
+            <a:endParaRPr lang="en-US" altLang="ja-JP" sz="2400" dirty="0"/>
+          </a:p>
+          <a:p>
+            <a:pPr marL="0" indent="0">
+              <a:buNone/>
+            </a:pPr>
             <a:endParaRPr lang="en-US" altLang="ja-JP" sz="2400" dirty="0"/>
           </a:p>
         </p:txBody>
@@ -14951,12 +15558,12 @@
         <p:spPr>
           <a:xfrm>
             <a:off x="427383" y="1487228"/>
-            <a:ext cx="10515600" cy="2435618"/>
+            <a:ext cx="10515600" cy="6462972"/>
           </a:xfrm>
         </p:spPr>
         <p:txBody>
           <a:bodyPr>
-            <a:normAutofit fontScale="92500"/>
+            <a:normAutofit/>
           </a:bodyPr>
           <a:lstStyle/>
           <a:p>
@@ -14971,11 +15578,30 @@
               </a:rPr>
               <a:t>・ヒント</a:t>
             </a:r>
-            <a:endParaRPr lang="en-US" altLang="ja-JP" sz="2400" dirty="0">
-              <a:solidFill>
-                <a:schemeClr val="accent6"/>
-              </a:solidFill>
-            </a:endParaRPr>
+            <a:r>
+              <a:rPr lang="en-US" altLang="ja-JP" sz="2400" dirty="0">
+                <a:solidFill>
+                  <a:schemeClr val="accent6"/>
+                </a:solidFill>
+              </a:rPr>
+              <a:t>(7</a:t>
+            </a:r>
+            <a:r>
+              <a:rPr lang="ja-JP" altLang="en-US" sz="2400" dirty="0">
+                <a:solidFill>
+                  <a:schemeClr val="accent6"/>
+                </a:solidFill>
+              </a:rPr>
+              <a:t>ページ前も参照</a:t>
+            </a:r>
+            <a:r>
+              <a:rPr lang="en-US" altLang="ja-JP" sz="2400" dirty="0">
+                <a:solidFill>
+                  <a:schemeClr val="accent6"/>
+                </a:solidFill>
+              </a:rPr>
+              <a:t>)</a:t>
+            </a:r>
           </a:p>
           <a:p>
             <a:pPr marL="0" indent="0">
@@ -15063,7 +15689,29 @@
               <a:rPr lang="ja-JP" altLang="en-US" sz="2400" dirty="0"/>
               <a:t>文で分岐させるのが良い</a:t>
             </a:r>
-            <a:endParaRPr lang="en-US" altLang="ja-JP" dirty="0"/>
+            <a:endParaRPr lang="en-US" altLang="ja-JP" sz="2400" dirty="0"/>
+          </a:p>
+          <a:p>
+            <a:pPr marL="0" indent="0">
+              <a:buNone/>
+            </a:pPr>
+            <a:endParaRPr lang="en-US" altLang="ja-JP" sz="2400" dirty="0"/>
+          </a:p>
+          <a:p>
+            <a:pPr marL="0" indent="0">
+              <a:buNone/>
+            </a:pPr>
+            <a:endParaRPr lang="en-US" altLang="ja-JP" sz="2400" dirty="0"/>
+          </a:p>
+          <a:p>
+            <a:pPr marL="0" indent="0">
+              <a:buNone/>
+            </a:pPr>
+            <a:r>
+              <a:rPr lang="ja-JP" altLang="en-US" sz="2400" dirty="0"/>
+              <a:t>コードを書いた後のシリアル通信のやり方は、お近くの部員まで！</a:t>
+            </a:r>
+            <a:endParaRPr lang="en-US" altLang="ja-JP" sz="2400" dirty="0"/>
           </a:p>
         </p:txBody>
       </p:sp>
@@ -15511,7 +16159,7 @@
           <a:bodyPr/>
           <a:lstStyle/>
           <a:p>
-            <a:endParaRPr lang="ja-JP" altLang="en-US"/>
+            <a:endParaRPr lang="ja-JP" altLang="en-US" dirty="0"/>
           </a:p>
         </p:txBody>
       </p:sp>
@@ -16190,6 +16838,63 @@
           </a:prstGeom>
         </p:spPr>
       </p:pic>
+      <p:sp>
+        <p:nvSpPr>
+          <p:cNvPr id="3" name="吹き出し: 角を丸めた四角形 2">
+            <a:extLst>
+              <a:ext uri="{FF2B5EF4-FFF2-40B4-BE49-F238E27FC236}">
+                <a16:creationId xmlns:a16="http://schemas.microsoft.com/office/drawing/2014/main" id="{8D69E7EA-7226-E737-4FD7-911537A95F6B}"/>
+              </a:ext>
+            </a:extLst>
+          </p:cNvPr>
+          <p:cNvSpPr/>
+          <p:nvPr/>
+        </p:nvSpPr>
+        <p:spPr>
+          <a:xfrm>
+            <a:off x="8366760" y="1386840"/>
+            <a:ext cx="3383280" cy="2042160"/>
+          </a:xfrm>
+          <a:prstGeom prst="wedgeRoundRectCallout">
+            <a:avLst>
+              <a:gd name="adj1" fmla="val -48986"/>
+              <a:gd name="adj2" fmla="val 75187"/>
+              <a:gd name="adj3" fmla="val 16667"/>
+            </a:avLst>
+          </a:prstGeom>
+          <a:ln/>
+        </p:spPr>
+        <p:style>
+          <a:lnRef idx="3">
+            <a:schemeClr val="lt1"/>
+          </a:lnRef>
+          <a:fillRef idx="1">
+            <a:schemeClr val="accent2"/>
+          </a:fillRef>
+          <a:effectRef idx="1">
+            <a:schemeClr val="accent2"/>
+          </a:effectRef>
+          <a:fontRef idx="minor">
+            <a:schemeClr val="lt1"/>
+          </a:fontRef>
+        </p:style>
+        <p:txBody>
+          <a:bodyPr rtlCol="0" anchor="ctr"/>
+          <a:lstStyle/>
+          <a:p>
+            <a:pPr algn="ctr"/>
+            <a:r>
+              <a:rPr kumimoji="1" lang="ja-JP" altLang="en-US" sz="3200" dirty="0">
+                <a:solidFill>
+                  <a:schemeClr val="tx1"/>
+                </a:solidFill>
+                <a:latin typeface="Helvetica Neue" panose="02000503000000020004" pitchFamily="2" charset="0"/>
+              </a:rPr>
+              <a:t>配線は触らないこと！</a:t>
+            </a:r>
+          </a:p>
+        </p:txBody>
+      </p:sp>
     </p:spTree>
     <p:extLst>
       <p:ext uri="{BB962C8B-B14F-4D97-AF65-F5344CB8AC3E}">
@@ -16827,6 +17532,52 @@
           </a:p>
         </p:txBody>
       </p:sp>
+      <p:sp>
+        <p:nvSpPr>
+          <p:cNvPr id="3" name="テキスト ボックス 2">
+            <a:extLst>
+              <a:ext uri="{FF2B5EF4-FFF2-40B4-BE49-F238E27FC236}">
+                <a16:creationId xmlns:a16="http://schemas.microsoft.com/office/drawing/2014/main" id="{23F45BAF-478D-E246-FF2A-83AFF37D3A93}"/>
+              </a:ext>
+            </a:extLst>
+          </p:cNvPr>
+          <p:cNvSpPr txBox="1"/>
+          <p:nvPr/>
+        </p:nvSpPr>
+        <p:spPr>
+          <a:xfrm>
+            <a:off x="2780900" y="6112863"/>
+            <a:ext cx="5493812" cy="646331"/>
+          </a:xfrm>
+          <a:prstGeom prst="rect">
+            <a:avLst/>
+          </a:prstGeom>
+          <a:noFill/>
+        </p:spPr>
+        <p:txBody>
+          <a:bodyPr wrap="none" rtlCol="0">
+            <a:spAutoFit/>
+          </a:bodyPr>
+          <a:lstStyle/>
+          <a:p>
+            <a:r>
+              <a:rPr kumimoji="1" lang="en-US" altLang="ja-JP" sz="1800" dirty="0"/>
+              <a:t>※</a:t>
+            </a:r>
+            <a:r>
+              <a:rPr kumimoji="1" lang="ja-JP" altLang="en-US" sz="1800" dirty="0"/>
+              <a:t>個体によって、どちらに差し込むか変わるので、</a:t>
+            </a:r>
+            <a:br>
+              <a:rPr kumimoji="1" lang="en-US" altLang="ja-JP" sz="1800" dirty="0"/>
+            </a:br>
+            <a:r>
+              <a:rPr kumimoji="1" lang="ja-JP" altLang="en-US" sz="1800" dirty="0"/>
+              <a:t>塞がれてない方を使ってください</a:t>
+            </a:r>
+          </a:p>
+        </p:txBody>
+      </p:sp>
     </p:spTree>
   </p:cSld>
   <p:clrMapOvr>
@@ -17372,13 +18123,13 @@
         </p:nvSpPr>
         <p:spPr>
           <a:xfrm>
-            <a:off x="2807144" y="5971284"/>
+            <a:off x="3235286" y="5291868"/>
             <a:ext cx="631178" cy="521274"/>
           </a:xfrm>
           <a:prstGeom prst="wedgeRectCallout">
             <a:avLst>
-              <a:gd name="adj1" fmla="val -78596"/>
-              <a:gd name="adj2" fmla="val -169196"/>
+              <a:gd name="adj1" fmla="val -139714"/>
+              <a:gd name="adj2" fmla="val -125342"/>
             </a:avLst>
           </a:prstGeom>
           <a:ln/>
@@ -17430,13 +18181,13 @@
         </p:nvSpPr>
         <p:spPr>
           <a:xfrm>
-            <a:off x="3122733" y="5306921"/>
+            <a:off x="2876291" y="5871935"/>
             <a:ext cx="631178" cy="521274"/>
           </a:xfrm>
           <a:prstGeom prst="wedgeRectCallout">
             <a:avLst>
-              <a:gd name="adj1" fmla="val -106801"/>
-              <a:gd name="adj2" fmla="val -72951"/>
+              <a:gd name="adj1" fmla="val -88692"/>
+              <a:gd name="adj2" fmla="val -156091"/>
             </a:avLst>
           </a:prstGeom>
           <a:ln/>
